--- a/content/sessions/slides/Session-1-Coming-Home-to-Yourself.pptx
+++ b/content/sessions/slides/Session-1-Coming-Home-to-Yourself.pptx
@@ -126,6 +126,1896 @@
     </a:lvl9pPr>
   </p:defaultTextStyle>
 </p:presentation>
+</file>
+
+<file path=ppt/notesMasters/notesMaster1.xml><?xml version="1.0" encoding="utf-8"?>
+<p:notesMaster xmlns:a="http://schemas.openxmlformats.org/drawingml/2006/main" xmlns:p="http://schemas.openxmlformats.org/presentationml/2006/main" xmlns:r="http://schemas.openxmlformats.org/officeDocument/2006/relationships">
+  <p:cSld>
+    <p:bg>
+      <p:bgRef idx="1001">
+        <a:schemeClr val="bg1"/>
+      </p:bgRef>
+    </p:bg>
+    <p:spTree>
+      <p:nvGrpSpPr>
+        <p:cNvPr id="1" name=""/>
+        <p:cNvGrpSpPr/>
+        <p:nvPr/>
+      </p:nvGrpSpPr>
+      <p:grpSpPr>
+        <a:xfrm>
+          <a:off x="0" y="0"/>
+          <a:ext cx="0" cy="0"/>
+          <a:chOff x="0" y="0"/>
+          <a:chExt cx="0" cy="0"/>
+        </a:xfrm>
+      </p:grpSpPr>
+      <p:sp>
+        <p:nvSpPr>
+          <p:cNvPr id="2" name="Header Placeholder 1"/>
+          <p:cNvSpPr>
+            <a:spLocks noGrp="1"/>
+          </p:cNvSpPr>
+          <p:nvPr>
+            <p:ph type="hdr" sz="quarter"/>
+          </p:nvPr>
+        </p:nvSpPr>
+        <p:spPr>
+          <a:xfrm>
+            <a:off x="0" y="0"/>
+            <a:ext cx="2971800" cy="457200"/>
+          </a:xfrm>
+          <a:prstGeom prst="rect">
+            <a:avLst/>
+          </a:prstGeom>
+        </p:spPr>
+        <p:txBody>
+          <a:bodyPr vert="horz" lIns="91440" tIns="45720" rIns="91440" bIns="45720" rtlCol="0"/>
+          <a:lstStyle>
+            <a:lvl1pPr algn="l">
+              <a:defRPr sz="1200"/>
+            </a:lvl1pPr>
+          </a:lstStyle>
+          <a:p>
+            <a:endParaRPr lang="en-US"/>
+          </a:p>
+        </p:txBody>
+      </p:sp>
+      <p:sp>
+        <p:nvSpPr>
+          <p:cNvPr id="3" name="Date Placeholder 2"/>
+          <p:cNvSpPr>
+            <a:spLocks noGrp="1"/>
+          </p:cNvSpPr>
+          <p:nvPr>
+            <p:ph type="dt" idx="1"/>
+          </p:nvPr>
+        </p:nvSpPr>
+        <p:spPr>
+          <a:xfrm>
+            <a:off x="3884613" y="0"/>
+            <a:ext cx="2971800" cy="457200"/>
+          </a:xfrm>
+          <a:prstGeom prst="rect">
+            <a:avLst/>
+          </a:prstGeom>
+        </p:spPr>
+        <p:txBody>
+          <a:bodyPr vert="horz" lIns="91440" tIns="45720" rIns="91440" bIns="45720" rtlCol="0"/>
+          <a:lstStyle>
+            <a:lvl1pPr algn="r">
+              <a:defRPr sz="1200"/>
+            </a:lvl1pPr>
+          </a:lstStyle>
+          <a:p>
+            <a:fld id="{0F89C1C7-3DCD-1040-A9CF-14679D8B5DDD}" type="datetimeFigureOut">
+              <a:rPr lang="en-US" smtClean="0"/>
+              <a:t>10/17/16</a:t>
+            </a:fld>
+            <a:endParaRPr lang="en-US"/>
+          </a:p>
+        </p:txBody>
+      </p:sp>
+      <p:sp>
+        <p:nvSpPr>
+          <p:cNvPr id="4" name="Slide Image Placeholder 3"/>
+          <p:cNvSpPr>
+            <a:spLocks noGrp="1" noRot="1" noChangeAspect="1"/>
+          </p:cNvSpPr>
+          <p:nvPr>
+            <p:ph type="sldImg" idx="2"/>
+          </p:nvPr>
+        </p:nvSpPr>
+        <p:spPr>
+          <a:xfrm>
+            <a:off x="1143000" y="685800"/>
+            <a:ext cx="4572000" cy="3429000"/>
+          </a:xfrm>
+          <a:prstGeom prst="rect">
+            <a:avLst/>
+          </a:prstGeom>
+          <a:noFill/>
+          <a:ln w="12700">
+            <a:solidFill>
+              <a:prstClr val="black"/>
+            </a:solidFill>
+          </a:ln>
+        </p:spPr>
+        <p:txBody>
+          <a:bodyPr vert="horz" lIns="91440" tIns="45720" rIns="91440" bIns="45720" rtlCol="0" anchor="ctr"/>
+          <a:lstStyle/>
+          <a:p>
+            <a:endParaRPr lang="en-US"/>
+          </a:p>
+        </p:txBody>
+      </p:sp>
+      <p:sp>
+        <p:nvSpPr>
+          <p:cNvPr id="5" name="Notes Placeholder 4"/>
+          <p:cNvSpPr>
+            <a:spLocks noGrp="1"/>
+          </p:cNvSpPr>
+          <p:nvPr>
+            <p:ph type="body" sz="quarter" idx="3"/>
+          </p:nvPr>
+        </p:nvSpPr>
+        <p:spPr>
+          <a:xfrm>
+            <a:off x="685800" y="4343400"/>
+            <a:ext cx="5486400" cy="4114800"/>
+          </a:xfrm>
+          <a:prstGeom prst="rect">
+            <a:avLst/>
+          </a:prstGeom>
+        </p:spPr>
+        <p:txBody>
+          <a:bodyPr vert="horz" lIns="91440" tIns="45720" rIns="91440" bIns="45720" rtlCol="0"/>
+          <a:lstStyle/>
+          <a:p>
+            <a:pPr lvl="0"/>
+            <a:r>
+              <a:rPr lang="en-US" smtClean="0"/>
+              <a:t>Click to edit Master text styles</a:t>
+            </a:r>
+          </a:p>
+          <a:p>
+            <a:pPr lvl="1"/>
+            <a:r>
+              <a:rPr lang="en-US" smtClean="0"/>
+              <a:t>Second level</a:t>
+            </a:r>
+          </a:p>
+          <a:p>
+            <a:pPr lvl="2"/>
+            <a:r>
+              <a:rPr lang="en-US" smtClean="0"/>
+              <a:t>Third level</a:t>
+            </a:r>
+          </a:p>
+          <a:p>
+            <a:pPr lvl="3"/>
+            <a:r>
+              <a:rPr lang="en-US" smtClean="0"/>
+              <a:t>Fourth level</a:t>
+            </a:r>
+          </a:p>
+          <a:p>
+            <a:pPr lvl="4"/>
+            <a:r>
+              <a:rPr lang="en-US" smtClean="0"/>
+              <a:t>Fifth level</a:t>
+            </a:r>
+            <a:endParaRPr lang="en-US"/>
+          </a:p>
+        </p:txBody>
+      </p:sp>
+      <p:sp>
+        <p:nvSpPr>
+          <p:cNvPr id="6" name="Footer Placeholder 5"/>
+          <p:cNvSpPr>
+            <a:spLocks noGrp="1"/>
+          </p:cNvSpPr>
+          <p:nvPr>
+            <p:ph type="ftr" sz="quarter" idx="4"/>
+          </p:nvPr>
+        </p:nvSpPr>
+        <p:spPr>
+          <a:xfrm>
+            <a:off x="0" y="8685213"/>
+            <a:ext cx="2971800" cy="457200"/>
+          </a:xfrm>
+          <a:prstGeom prst="rect">
+            <a:avLst/>
+          </a:prstGeom>
+        </p:spPr>
+        <p:txBody>
+          <a:bodyPr vert="horz" lIns="91440" tIns="45720" rIns="91440" bIns="45720" rtlCol="0" anchor="b"/>
+          <a:lstStyle>
+            <a:lvl1pPr algn="l">
+              <a:defRPr sz="1200"/>
+            </a:lvl1pPr>
+          </a:lstStyle>
+          <a:p>
+            <a:endParaRPr lang="en-US"/>
+          </a:p>
+        </p:txBody>
+      </p:sp>
+      <p:sp>
+        <p:nvSpPr>
+          <p:cNvPr id="7" name="Slide Number Placeholder 6"/>
+          <p:cNvSpPr>
+            <a:spLocks noGrp="1"/>
+          </p:cNvSpPr>
+          <p:nvPr>
+            <p:ph type="sldNum" sz="quarter" idx="5"/>
+          </p:nvPr>
+        </p:nvSpPr>
+        <p:spPr>
+          <a:xfrm>
+            <a:off x="3884613" y="8685213"/>
+            <a:ext cx="2971800" cy="457200"/>
+          </a:xfrm>
+          <a:prstGeom prst="rect">
+            <a:avLst/>
+          </a:prstGeom>
+        </p:spPr>
+        <p:txBody>
+          <a:bodyPr vert="horz" lIns="91440" tIns="45720" rIns="91440" bIns="45720" rtlCol="0" anchor="b"/>
+          <a:lstStyle>
+            <a:lvl1pPr algn="r">
+              <a:defRPr sz="1200"/>
+            </a:lvl1pPr>
+          </a:lstStyle>
+          <a:p>
+            <a:fld id="{BB5E49A5-4136-284D-997B-48E1D791AD67}" type="slidenum">
+              <a:rPr lang="en-US" smtClean="0"/>
+              <a:t>‹#›</a:t>
+            </a:fld>
+            <a:endParaRPr lang="en-US"/>
+          </a:p>
+        </p:txBody>
+      </p:sp>
+    </p:spTree>
+    <p:extLst>
+      <p:ext uri="{BB962C8B-B14F-4D97-AF65-F5344CB8AC3E}">
+        <p14:creationId xmlns:p14="http://schemas.microsoft.com/office/powerpoint/2010/main" val="2623252185"/>
+      </p:ext>
+    </p:extLst>
+  </p:cSld>
+  <p:clrMap bg1="lt1" tx1="dk1" bg2="lt2" tx2="dk2" accent1="accent1" accent2="accent2" accent3="accent3" accent4="accent4" accent5="accent5" accent6="accent6" hlink="hlink" folHlink="folHlink"/>
+  <p:notesStyle>
+    <a:lvl1pPr marL="0" algn="l" defTabSz="457200" rtl="0" eaLnBrk="1" latinLnBrk="0" hangingPunct="1">
+      <a:defRPr sz="1200" kern="1200">
+        <a:solidFill>
+          <a:schemeClr val="tx1"/>
+        </a:solidFill>
+        <a:latin typeface="+mn-lt"/>
+        <a:ea typeface="+mn-ea"/>
+        <a:cs typeface="+mn-cs"/>
+      </a:defRPr>
+    </a:lvl1pPr>
+    <a:lvl2pPr marL="457200" algn="l" defTabSz="457200" rtl="0" eaLnBrk="1" latinLnBrk="0" hangingPunct="1">
+      <a:defRPr sz="1200" kern="1200">
+        <a:solidFill>
+          <a:schemeClr val="tx1"/>
+        </a:solidFill>
+        <a:latin typeface="+mn-lt"/>
+        <a:ea typeface="+mn-ea"/>
+        <a:cs typeface="+mn-cs"/>
+      </a:defRPr>
+    </a:lvl2pPr>
+    <a:lvl3pPr marL="914400" algn="l" defTabSz="457200" rtl="0" eaLnBrk="1" latinLnBrk="0" hangingPunct="1">
+      <a:defRPr sz="1200" kern="1200">
+        <a:solidFill>
+          <a:schemeClr val="tx1"/>
+        </a:solidFill>
+        <a:latin typeface="+mn-lt"/>
+        <a:ea typeface="+mn-ea"/>
+        <a:cs typeface="+mn-cs"/>
+      </a:defRPr>
+    </a:lvl3pPr>
+    <a:lvl4pPr marL="1371600" algn="l" defTabSz="457200" rtl="0" eaLnBrk="1" latinLnBrk="0" hangingPunct="1">
+      <a:defRPr sz="1200" kern="1200">
+        <a:solidFill>
+          <a:schemeClr val="tx1"/>
+        </a:solidFill>
+        <a:latin typeface="+mn-lt"/>
+        <a:ea typeface="+mn-ea"/>
+        <a:cs typeface="+mn-cs"/>
+      </a:defRPr>
+    </a:lvl4pPr>
+    <a:lvl5pPr marL="1828800" algn="l" defTabSz="457200" rtl="0" eaLnBrk="1" latinLnBrk="0" hangingPunct="1">
+      <a:defRPr sz="1200" kern="1200">
+        <a:solidFill>
+          <a:schemeClr val="tx1"/>
+        </a:solidFill>
+        <a:latin typeface="+mn-lt"/>
+        <a:ea typeface="+mn-ea"/>
+        <a:cs typeface="+mn-cs"/>
+      </a:defRPr>
+    </a:lvl5pPr>
+    <a:lvl6pPr marL="2286000" algn="l" defTabSz="457200" rtl="0" eaLnBrk="1" latinLnBrk="0" hangingPunct="1">
+      <a:defRPr sz="1200" kern="1200">
+        <a:solidFill>
+          <a:schemeClr val="tx1"/>
+        </a:solidFill>
+        <a:latin typeface="+mn-lt"/>
+        <a:ea typeface="+mn-ea"/>
+        <a:cs typeface="+mn-cs"/>
+      </a:defRPr>
+    </a:lvl6pPr>
+    <a:lvl7pPr marL="2743200" algn="l" defTabSz="457200" rtl="0" eaLnBrk="1" latinLnBrk="0" hangingPunct="1">
+      <a:defRPr sz="1200" kern="1200">
+        <a:solidFill>
+          <a:schemeClr val="tx1"/>
+        </a:solidFill>
+        <a:latin typeface="+mn-lt"/>
+        <a:ea typeface="+mn-ea"/>
+        <a:cs typeface="+mn-cs"/>
+      </a:defRPr>
+    </a:lvl7pPr>
+    <a:lvl8pPr marL="3200400" algn="l" defTabSz="457200" rtl="0" eaLnBrk="1" latinLnBrk="0" hangingPunct="1">
+      <a:defRPr sz="1200" kern="1200">
+        <a:solidFill>
+          <a:schemeClr val="tx1"/>
+        </a:solidFill>
+        <a:latin typeface="+mn-lt"/>
+        <a:ea typeface="+mn-ea"/>
+        <a:cs typeface="+mn-cs"/>
+      </a:defRPr>
+    </a:lvl8pPr>
+    <a:lvl9pPr marL="3657600" algn="l" defTabSz="457200" rtl="0" eaLnBrk="1" latinLnBrk="0" hangingPunct="1">
+      <a:defRPr sz="1200" kern="1200">
+        <a:solidFill>
+          <a:schemeClr val="tx1"/>
+        </a:solidFill>
+        <a:latin typeface="+mn-lt"/>
+        <a:ea typeface="+mn-ea"/>
+        <a:cs typeface="+mn-cs"/>
+      </a:defRPr>
+    </a:lvl9pPr>
+  </p:notesStyle>
+</p:notesMaster>
+</file>
+
+<file path=ppt/notesSlides/notesSlide1.xml><?xml version="1.0" encoding="utf-8"?>
+<p:notes xmlns:a="http://schemas.openxmlformats.org/drawingml/2006/main" xmlns:p="http://schemas.openxmlformats.org/presentationml/2006/main" xmlns:r="http://schemas.openxmlformats.org/officeDocument/2006/relationships">
+  <p:cSld>
+    <p:spTree>
+      <p:nvGrpSpPr>
+        <p:cNvPr id="1" name=""/>
+        <p:cNvGrpSpPr/>
+        <p:nvPr/>
+      </p:nvGrpSpPr>
+      <p:grpSpPr>
+        <a:xfrm>
+          <a:off x="0" y="0"/>
+          <a:ext cx="0" cy="0"/>
+          <a:chOff x="0" y="0"/>
+          <a:chExt cx="0" cy="0"/>
+        </a:xfrm>
+      </p:grpSpPr>
+      <p:sp>
+        <p:nvSpPr>
+          <p:cNvPr id="2" name="Slide Image Placeholder 1"/>
+          <p:cNvSpPr>
+            <a:spLocks noGrp="1"/>
+          </p:cNvSpPr>
+          <p:nvPr>
+            <p:ph type="sldImg" idx="2"/>
+          </p:nvPr>
+        </p:nvSpPr>
+        <p:spPr/>
+      </p:sp>
+      <p:sp>
+        <p:nvSpPr>
+          <p:cNvPr id="3" name="Notes Placeholder 2"/>
+          <p:cNvSpPr>
+            <a:spLocks noGrp="1"/>
+          </p:cNvSpPr>
+          <p:nvPr>
+            <p:ph type="body" idx="3" sz="quarter"/>
+          </p:nvPr>
+        </p:nvSpPr>
+        <p:spPr/>
+        <p:txBody>
+          <a:bodyPr/>
+          <a:lstStyle/>
+          <a:p>
+            <a:r>
+              <a:t>Welcome. Candle, circle agreements: what's shared here stays here; we witness, we don't fix or rescue; there's no right or wrong way; there's no such thing as too much. Soften in: feet, jaw, shoulders, belly, three breaths. Tonight we find her, your needs, wants, deepest desires. One-word go-round.</a:t>
+            </a:r>
+          </a:p>
+        </p:txBody>
+      </p:sp>
+      <p:sp>
+        <p:nvSpPr>
+          <p:cNvPr id="4" name="Slide Number Placeholder 3"/>
+          <p:cNvSpPr>
+            <a:spLocks noGrp="1"/>
+          </p:cNvSpPr>
+          <p:nvPr>
+            <p:ph type="sldNum" idx="5" sz="quarter"/>
+          </p:nvPr>
+        </p:nvSpPr>
+        <p:spPr/>
+      </p:sp>
+    </p:spTree>
+  </p:cSld>
+  <p:clrMapOvr>
+    <a:masterClrMapping/>
+  </p:clrMapOvr>
+</p:notes>
+</file>
+
+<file path=ppt/notesSlides/notesSlide10.xml><?xml version="1.0" encoding="utf-8"?>
+<p:notes xmlns:a="http://schemas.openxmlformats.org/drawingml/2006/main" xmlns:p="http://schemas.openxmlformats.org/presentationml/2006/main" xmlns:r="http://schemas.openxmlformats.org/officeDocument/2006/relationships">
+  <p:cSld>
+    <p:spTree>
+      <p:nvGrpSpPr>
+        <p:cNvPr id="1" name=""/>
+        <p:cNvGrpSpPr/>
+        <p:nvPr/>
+      </p:nvGrpSpPr>
+      <p:grpSpPr>
+        <a:xfrm>
+          <a:off x="0" y="0"/>
+          <a:ext cx="0" cy="0"/>
+          <a:chOff x="0" y="0"/>
+          <a:chExt cx="0" cy="0"/>
+        </a:xfrm>
+      </p:grpSpPr>
+      <p:sp>
+        <p:nvSpPr>
+          <p:cNvPr id="2" name="Slide Image Placeholder 1"/>
+          <p:cNvSpPr>
+            <a:spLocks noGrp="1"/>
+          </p:cNvSpPr>
+          <p:nvPr>
+            <p:ph type="sldImg" idx="2"/>
+          </p:nvPr>
+        </p:nvSpPr>
+        <p:spPr/>
+      </p:sp>
+      <p:sp>
+        <p:nvSpPr>
+          <p:cNvPr id="3" name="Notes Placeholder 2"/>
+          <p:cNvSpPr>
+            <a:spLocks noGrp="1"/>
+          </p:cNvSpPr>
+          <p:nvPr>
+            <p:ph type="body" idx="3" sz="quarter"/>
+          </p:nvPr>
+        </p:nvSpPr>
+        <p:spPr/>
+        <p:txBody>
+          <a:bodyPr/>
+          <a:lstStyle/>
+          <a:p>
+            <a:r>
+              <a:t>Said gently: you have taught the people around you exactly how much of you to see. A habit, not a fact. Tonight we start practising the opposite.</a:t>
+            </a:r>
+          </a:p>
+        </p:txBody>
+      </p:sp>
+      <p:sp>
+        <p:nvSpPr>
+          <p:cNvPr id="4" name="Slide Number Placeholder 3"/>
+          <p:cNvSpPr>
+            <a:spLocks noGrp="1"/>
+          </p:cNvSpPr>
+          <p:nvPr>
+            <p:ph type="sldNum" idx="5" sz="quarter"/>
+          </p:nvPr>
+        </p:nvSpPr>
+        <p:spPr/>
+      </p:sp>
+    </p:spTree>
+  </p:cSld>
+  <p:clrMapOvr>
+    <a:masterClrMapping/>
+  </p:clrMapOvr>
+</p:notes>
+</file>
+
+<file path=ppt/notesSlides/notesSlide11.xml><?xml version="1.0" encoding="utf-8"?>
+<p:notes xmlns:a="http://schemas.openxmlformats.org/drawingml/2006/main" xmlns:p="http://schemas.openxmlformats.org/presentationml/2006/main" xmlns:r="http://schemas.openxmlformats.org/officeDocument/2006/relationships">
+  <p:cSld>
+    <p:spTree>
+      <p:nvGrpSpPr>
+        <p:cNvPr id="1" name=""/>
+        <p:cNvGrpSpPr/>
+        <p:nvPr/>
+      </p:nvGrpSpPr>
+      <p:grpSpPr>
+        <a:xfrm>
+          <a:off x="0" y="0"/>
+          <a:ext cx="0" cy="0"/>
+          <a:chOff x="0" y="0"/>
+          <a:chExt cx="0" cy="0"/>
+        </a:xfrm>
+      </p:grpSpPr>
+      <p:sp>
+        <p:nvSpPr>
+          <p:cNvPr id="2" name="Slide Image Placeholder 1"/>
+          <p:cNvSpPr>
+            <a:spLocks noGrp="1"/>
+          </p:cNvSpPr>
+          <p:nvPr>
+            <p:ph type="sldImg" idx="2"/>
+          </p:nvPr>
+        </p:nvSpPr>
+        <p:spPr/>
+      </p:sp>
+      <p:sp>
+        <p:nvSpPr>
+          <p:cNvPr id="3" name="Notes Placeholder 2"/>
+          <p:cNvSpPr>
+            <a:spLocks noGrp="1"/>
+          </p:cNvSpPr>
+          <p:nvPr>
+            <p:ph type="body" idx="3" sz="quarter"/>
+          </p:nvPr>
+        </p:nvSpPr>
+        <p:spPr/>
+        <p:txBody>
+          <a:bodyPr/>
+          <a:lstStyle/>
+          <a:p>
+            <a:r>
+              <a:t>The shift, presencing: I stop waiting to be seen, I turn toward myself and make myself visible. It is my destiny to be visible. From making others responsible for seeing me, to seeing and presencing myself.</a:t>
+            </a:r>
+          </a:p>
+        </p:txBody>
+      </p:sp>
+      <p:sp>
+        <p:nvSpPr>
+          <p:cNvPr id="4" name="Slide Number Placeholder 3"/>
+          <p:cNvSpPr>
+            <a:spLocks noGrp="1"/>
+          </p:cNvSpPr>
+          <p:nvPr>
+            <p:ph type="sldNum" idx="5" sz="quarter"/>
+          </p:nvPr>
+        </p:nvSpPr>
+        <p:spPr/>
+      </p:sp>
+    </p:spTree>
+  </p:cSld>
+  <p:clrMapOvr>
+    <a:masterClrMapping/>
+  </p:clrMapOvr>
+</p:notes>
+</file>
+
+<file path=ppt/notesSlides/notesSlide12.xml><?xml version="1.0" encoding="utf-8"?>
+<p:notes xmlns:a="http://schemas.openxmlformats.org/drawingml/2006/main" xmlns:p="http://schemas.openxmlformats.org/presentationml/2006/main" xmlns:r="http://schemas.openxmlformats.org/officeDocument/2006/relationships">
+  <p:cSld>
+    <p:spTree>
+      <p:nvGrpSpPr>
+        <p:cNvPr id="1" name=""/>
+        <p:cNvGrpSpPr/>
+        <p:nvPr/>
+      </p:nvGrpSpPr>
+      <p:grpSpPr>
+        <a:xfrm>
+          <a:off x="0" y="0"/>
+          <a:ext cx="0" cy="0"/>
+          <a:chOff x="0" y="0"/>
+          <a:chExt cx="0" cy="0"/>
+        </a:xfrm>
+      </p:grpSpPr>
+      <p:sp>
+        <p:nvSpPr>
+          <p:cNvPr id="2" name="Slide Image Placeholder 1"/>
+          <p:cNvSpPr>
+            <a:spLocks noGrp="1"/>
+          </p:cNvSpPr>
+          <p:nvPr>
+            <p:ph type="sldImg" idx="2"/>
+          </p:nvPr>
+        </p:nvSpPr>
+        <p:spPr/>
+      </p:sp>
+      <p:sp>
+        <p:nvSpPr>
+          <p:cNvPr id="3" name="Notes Placeholder 2"/>
+          <p:cNvSpPr>
+            <a:spLocks noGrp="1"/>
+          </p:cNvSpPr>
+          <p:nvPr>
+            <p:ph type="body" idx="3" sz="quarter"/>
+          </p:nvPr>
+        </p:nvSpPr>
+        <p:spPr/>
+        <p:txBody>
+          <a:bodyPr/>
+          <a:lstStyle/>
+          <a:p>
+            <a:r>
+              <a:t>Broadcast. In pairs: 'One way I make myself invisible is...' / 'One way I've trained people not to see my needs is...' / 'The story underneath might be... invisible, not enough, too much, a burden.' Partner witnesses, no fixing. Swap. Main-room: the way I disappear is...</a:t>
+            </a:r>
+          </a:p>
+        </p:txBody>
+      </p:sp>
+      <p:sp>
+        <p:nvSpPr>
+          <p:cNvPr id="4" name="Slide Number Placeholder 3"/>
+          <p:cNvSpPr>
+            <a:spLocks noGrp="1"/>
+          </p:cNvSpPr>
+          <p:nvPr>
+            <p:ph type="sldNum" idx="5" sz="quarter"/>
+          </p:nvPr>
+        </p:nvSpPr>
+        <p:spPr/>
+      </p:sp>
+    </p:spTree>
+  </p:cSld>
+  <p:clrMapOvr>
+    <a:masterClrMapping/>
+  </p:clrMapOvr>
+</p:notes>
+</file>
+
+<file path=ppt/notesSlides/notesSlide13.xml><?xml version="1.0" encoding="utf-8"?>
+<p:notes xmlns:a="http://schemas.openxmlformats.org/drawingml/2006/main" xmlns:p="http://schemas.openxmlformats.org/presentationml/2006/main" xmlns:r="http://schemas.openxmlformats.org/officeDocument/2006/relationships">
+  <p:cSld>
+    <p:spTree>
+      <p:nvGrpSpPr>
+        <p:cNvPr id="1" name=""/>
+        <p:cNvGrpSpPr/>
+        <p:nvPr/>
+      </p:nvGrpSpPr>
+      <p:grpSpPr>
+        <a:xfrm>
+          <a:off x="0" y="0"/>
+          <a:ext cx="0" cy="0"/>
+          <a:chOff x="0" y="0"/>
+          <a:chExt cx="0" cy="0"/>
+        </a:xfrm>
+      </p:grpSpPr>
+      <p:sp>
+        <p:nvSpPr>
+          <p:cNvPr id="2" name="Slide Image Placeholder 1"/>
+          <p:cNvSpPr>
+            <a:spLocks noGrp="1"/>
+          </p:cNvSpPr>
+          <p:nvPr>
+            <p:ph type="sldImg" idx="2"/>
+          </p:nvPr>
+        </p:nvSpPr>
+        <p:spPr/>
+      </p:sp>
+      <p:sp>
+        <p:nvSpPr>
+          <p:cNvPr id="3" name="Notes Placeholder 2"/>
+          <p:cNvSpPr>
+            <a:spLocks noGrp="1"/>
+          </p:cNvSpPr>
+          <p:nvPr>
+            <p:ph type="body" idx="3" sz="quarter"/>
+          </p:nvPr>
+        </p:nvSpPr>
+        <p:spPr/>
+        <p:txBody>
+          <a:bodyPr/>
+          <a:lstStyle/>
+          <a:p>
+            <a:r>
+              <a:t>Part one. The no is the doorway into your desires. Your body already knows it.</a:t>
+            </a:r>
+          </a:p>
+        </p:txBody>
+      </p:sp>
+      <p:sp>
+        <p:nvSpPr>
+          <p:cNvPr id="4" name="Slide Number Placeholder 3"/>
+          <p:cNvSpPr>
+            <a:spLocks noGrp="1"/>
+          </p:cNvSpPr>
+          <p:nvPr>
+            <p:ph type="sldNum" idx="5" sz="quarter"/>
+          </p:nvPr>
+        </p:nvSpPr>
+        <p:spPr/>
+      </p:sp>
+    </p:spTree>
+  </p:cSld>
+  <p:clrMapOvr>
+    <a:masterClrMapping/>
+  </p:clrMapOvr>
+</p:notes>
+</file>
+
+<file path=ppt/notesSlides/notesSlide14.xml><?xml version="1.0" encoding="utf-8"?>
+<p:notes xmlns:a="http://schemas.openxmlformats.org/drawingml/2006/main" xmlns:p="http://schemas.openxmlformats.org/presentationml/2006/main" xmlns:r="http://schemas.openxmlformats.org/officeDocument/2006/relationships">
+  <p:cSld>
+    <p:spTree>
+      <p:nvGrpSpPr>
+        <p:cNvPr id="1" name=""/>
+        <p:cNvGrpSpPr/>
+        <p:nvPr/>
+      </p:nvGrpSpPr>
+      <p:grpSpPr>
+        <a:xfrm>
+          <a:off x="0" y="0"/>
+          <a:ext cx="0" cy="0"/>
+          <a:chOff x="0" y="0"/>
+          <a:chExt cx="0" cy="0"/>
+        </a:xfrm>
+      </p:grpSpPr>
+      <p:sp>
+        <p:nvSpPr>
+          <p:cNvPr id="2" name="Slide Image Placeholder 1"/>
+          <p:cNvSpPr>
+            <a:spLocks noGrp="1"/>
+          </p:cNvSpPr>
+          <p:nvPr>
+            <p:ph type="sldImg" idx="2"/>
+          </p:nvPr>
+        </p:nvSpPr>
+        <p:spPr/>
+      </p:sp>
+      <p:sp>
+        <p:nvSpPr>
+          <p:cNvPr id="3" name="Notes Placeholder 2"/>
+          <p:cNvSpPr>
+            <a:spLocks noGrp="1"/>
+          </p:cNvSpPr>
+          <p:nvPr>
+            <p:ph type="body" idx="3" sz="quarter"/>
+          </p:nvPr>
+        </p:nvSpPr>
+        <p:spPr/>
+        <p:txBody>
+          <a:bodyPr/>
+          <a:lstStyle/>
+          <a:p>
+            <a:r>
+              <a:t>Journal round, about 7 minutes, soft music: What I'm tired of pretending is... / What I'm done tolerating is... / What I no longer want is... Feel it, don't think it.</a:t>
+            </a:r>
+          </a:p>
+        </p:txBody>
+      </p:sp>
+      <p:sp>
+        <p:nvSpPr>
+          <p:cNvPr id="4" name="Slide Number Placeholder 3"/>
+          <p:cNvSpPr>
+            <a:spLocks noGrp="1"/>
+          </p:cNvSpPr>
+          <p:nvPr>
+            <p:ph type="sldNum" idx="5" sz="quarter"/>
+          </p:nvPr>
+        </p:nvSpPr>
+        <p:spPr/>
+      </p:sp>
+    </p:spTree>
+  </p:cSld>
+  <p:clrMapOvr>
+    <a:masterClrMapping/>
+  </p:clrMapOvr>
+</p:notes>
+</file>
+
+<file path=ppt/notesSlides/notesSlide15.xml><?xml version="1.0" encoding="utf-8"?>
+<p:notes xmlns:a="http://schemas.openxmlformats.org/drawingml/2006/main" xmlns:p="http://schemas.openxmlformats.org/presentationml/2006/main" xmlns:r="http://schemas.openxmlformats.org/officeDocument/2006/relationships">
+  <p:cSld>
+    <p:spTree>
+      <p:nvGrpSpPr>
+        <p:cNvPr id="1" name=""/>
+        <p:cNvGrpSpPr/>
+        <p:nvPr/>
+      </p:nvGrpSpPr>
+      <p:grpSpPr>
+        <a:xfrm>
+          <a:off x="0" y="0"/>
+          <a:ext cx="0" cy="0"/>
+          <a:chOff x="0" y="0"/>
+          <a:chExt cx="0" cy="0"/>
+        </a:xfrm>
+      </p:grpSpPr>
+      <p:sp>
+        <p:nvSpPr>
+          <p:cNvPr id="2" name="Slide Image Placeholder 1"/>
+          <p:cNvSpPr>
+            <a:spLocks noGrp="1"/>
+          </p:cNvSpPr>
+          <p:nvPr>
+            <p:ph type="sldImg" idx="2"/>
+          </p:nvPr>
+        </p:nvSpPr>
+        <p:spPr/>
+      </p:sp>
+      <p:sp>
+        <p:nvSpPr>
+          <p:cNvPr id="3" name="Notes Placeholder 2"/>
+          <p:cNvSpPr>
+            <a:spLocks noGrp="1"/>
+          </p:cNvSpPr>
+          <p:nvPr>
+            <p:ph type="body" idx="3" sz="quarter"/>
+          </p:nvPr>
+        </p:nvSpPr>
+        <p:spPr/>
+        <p:txBody>
+          <a:bodyPr/>
+          <a:lstStyle/>
+          <a:p>
+            <a:r>
+              <a:t>Part two. Every no is holding a yes behind it.</a:t>
+            </a:r>
+          </a:p>
+        </p:txBody>
+      </p:sp>
+      <p:sp>
+        <p:nvSpPr>
+          <p:cNvPr id="4" name="Slide Number Placeholder 3"/>
+          <p:cNvSpPr>
+            <a:spLocks noGrp="1"/>
+          </p:cNvSpPr>
+          <p:nvPr>
+            <p:ph type="sldNum" idx="5" sz="quarter"/>
+          </p:nvPr>
+        </p:nvSpPr>
+        <p:spPr/>
+      </p:sp>
+    </p:spTree>
+  </p:cSld>
+  <p:clrMapOvr>
+    <a:masterClrMapping/>
+  </p:clrMapOvr>
+</p:notes>
+</file>
+
+<file path=ppt/notesSlides/notesSlide16.xml><?xml version="1.0" encoding="utf-8"?>
+<p:notes xmlns:a="http://schemas.openxmlformats.org/drawingml/2006/main" xmlns:p="http://schemas.openxmlformats.org/presentationml/2006/main" xmlns:r="http://schemas.openxmlformats.org/officeDocument/2006/relationships">
+  <p:cSld>
+    <p:spTree>
+      <p:nvGrpSpPr>
+        <p:cNvPr id="1" name=""/>
+        <p:cNvGrpSpPr/>
+        <p:nvPr/>
+      </p:nvGrpSpPr>
+      <p:grpSpPr>
+        <a:xfrm>
+          <a:off x="0" y="0"/>
+          <a:ext cx="0" cy="0"/>
+          <a:chOff x="0" y="0"/>
+          <a:chExt cx="0" cy="0"/>
+        </a:xfrm>
+      </p:grpSpPr>
+      <p:sp>
+        <p:nvSpPr>
+          <p:cNvPr id="2" name="Slide Image Placeholder 1"/>
+          <p:cNvSpPr>
+            <a:spLocks noGrp="1"/>
+          </p:cNvSpPr>
+          <p:nvPr>
+            <p:ph type="sldImg" idx="2"/>
+          </p:nvPr>
+        </p:nvSpPr>
+        <p:spPr/>
+      </p:sp>
+      <p:sp>
+        <p:nvSpPr>
+          <p:cNvPr id="3" name="Notes Placeholder 2"/>
+          <p:cNvSpPr>
+            <a:spLocks noGrp="1"/>
+          </p:cNvSpPr>
+          <p:nvPr>
+            <p:ph type="body" idx="3" sz="quarter"/>
+          </p:nvPr>
+        </p:nvSpPr>
+        <p:spPr/>
+        <p:txBody>
+          <a:bodyPr/>
+          <a:lstStyle/>
+          <a:p>
+            <a:r>
+              <a:t>Journal, then say it out loud: The kind of touch I'm craving is... / A way I want to receive more is... / If I trusted myself completely, I would... Then speak one want out loud in dyads.</a:t>
+            </a:r>
+          </a:p>
+        </p:txBody>
+      </p:sp>
+      <p:sp>
+        <p:nvSpPr>
+          <p:cNvPr id="4" name="Slide Number Placeholder 3"/>
+          <p:cNvSpPr>
+            <a:spLocks noGrp="1"/>
+          </p:cNvSpPr>
+          <p:nvPr>
+            <p:ph type="sldNum" idx="5" sz="quarter"/>
+          </p:nvPr>
+        </p:nvSpPr>
+        <p:spPr/>
+      </p:sp>
+    </p:spTree>
+  </p:cSld>
+  <p:clrMapOvr>
+    <a:masterClrMapping/>
+  </p:clrMapOvr>
+</p:notes>
+</file>
+
+<file path=ppt/notesSlides/notesSlide17.xml><?xml version="1.0" encoding="utf-8"?>
+<p:notes xmlns:a="http://schemas.openxmlformats.org/drawingml/2006/main" xmlns:p="http://schemas.openxmlformats.org/presentationml/2006/main" xmlns:r="http://schemas.openxmlformats.org/officeDocument/2006/relationships">
+  <p:cSld>
+    <p:spTree>
+      <p:nvGrpSpPr>
+        <p:cNvPr id="1" name=""/>
+        <p:cNvGrpSpPr/>
+        <p:nvPr/>
+      </p:nvGrpSpPr>
+      <p:grpSpPr>
+        <a:xfrm>
+          <a:off x="0" y="0"/>
+          <a:ext cx="0" cy="0"/>
+          <a:chOff x="0" y="0"/>
+          <a:chExt cx="0" cy="0"/>
+        </a:xfrm>
+      </p:grpSpPr>
+      <p:sp>
+        <p:nvSpPr>
+          <p:cNvPr id="2" name="Slide Image Placeholder 1"/>
+          <p:cNvSpPr>
+            <a:spLocks noGrp="1"/>
+          </p:cNvSpPr>
+          <p:nvPr>
+            <p:ph type="sldImg" idx="2"/>
+          </p:nvPr>
+        </p:nvSpPr>
+        <p:spPr/>
+      </p:sp>
+      <p:sp>
+        <p:nvSpPr>
+          <p:cNvPr id="3" name="Notes Placeholder 2"/>
+          <p:cNvSpPr>
+            <a:spLocks noGrp="1"/>
+          </p:cNvSpPr>
+          <p:nvPr>
+            <p:ph type="body" idx="3" sz="quarter"/>
+          </p:nvPr>
+        </p:nvSpPr>
+        <p:spPr/>
+        <p:txBody>
+          <a:bodyPr/>
+          <a:lstStyle/>
+          <a:p>
+            <a:r>
+              <a:t>Part three. Explore in pairs. Underneath the want is the desire your whole life is organised around. Guide a short drop-in first if there's time.</a:t>
+            </a:r>
+          </a:p>
+        </p:txBody>
+      </p:sp>
+      <p:sp>
+        <p:nvSpPr>
+          <p:cNvPr id="4" name="Slide Number Placeholder 3"/>
+          <p:cNvSpPr>
+            <a:spLocks noGrp="1"/>
+          </p:cNvSpPr>
+          <p:nvPr>
+            <p:ph type="sldNum" idx="5" sz="quarter"/>
+          </p:nvPr>
+        </p:nvSpPr>
+        <p:spPr/>
+      </p:sp>
+    </p:spTree>
+  </p:cSld>
+  <p:clrMapOvr>
+    <a:masterClrMapping/>
+  </p:clrMapOvr>
+</p:notes>
+</file>
+
+<file path=ppt/notesSlides/notesSlide18.xml><?xml version="1.0" encoding="utf-8"?>
+<p:notes xmlns:a="http://schemas.openxmlformats.org/drawingml/2006/main" xmlns:p="http://schemas.openxmlformats.org/presentationml/2006/main" xmlns:r="http://schemas.openxmlformats.org/officeDocument/2006/relationships">
+  <p:cSld>
+    <p:spTree>
+      <p:nvGrpSpPr>
+        <p:cNvPr id="1" name=""/>
+        <p:cNvGrpSpPr/>
+        <p:nvPr/>
+      </p:nvGrpSpPr>
+      <p:grpSpPr>
+        <a:xfrm>
+          <a:off x="0" y="0"/>
+          <a:ext cx="0" cy="0"/>
+          <a:chOff x="0" y="0"/>
+          <a:chExt cx="0" cy="0"/>
+        </a:xfrm>
+      </p:grpSpPr>
+      <p:sp>
+        <p:nvSpPr>
+          <p:cNvPr id="2" name="Slide Image Placeholder 1"/>
+          <p:cNvSpPr>
+            <a:spLocks noGrp="1"/>
+          </p:cNvSpPr>
+          <p:nvPr>
+            <p:ph type="sldImg" idx="2"/>
+          </p:nvPr>
+        </p:nvSpPr>
+        <p:spPr/>
+      </p:sp>
+      <p:sp>
+        <p:nvSpPr>
+          <p:cNvPr id="3" name="Notes Placeholder 2"/>
+          <p:cNvSpPr>
+            <a:spLocks noGrp="1"/>
+          </p:cNvSpPr>
+          <p:nvPr>
+            <p:ph type="body" idx="3" sz="quarter"/>
+          </p:nvPr>
+        </p:nvSpPr>
+        <p:spPr/>
+        <p:txBody>
+          <a:bodyPr/>
+          <a:lstStyle/>
+          <a:p>
+            <a:r>
+              <a:t>And if I had that, what would it give me? Keep asking, going seven levels deep. Reach for the true answer, not the impressive one.</a:t>
+            </a:r>
+          </a:p>
+        </p:txBody>
+      </p:sp>
+      <p:sp>
+        <p:nvSpPr>
+          <p:cNvPr id="4" name="Slide Number Placeholder 3"/>
+          <p:cNvSpPr>
+            <a:spLocks noGrp="1"/>
+          </p:cNvSpPr>
+          <p:nvPr>
+            <p:ph type="sldNum" idx="5" sz="quarter"/>
+          </p:nvPr>
+        </p:nvSpPr>
+        <p:spPr/>
+      </p:sp>
+    </p:spTree>
+  </p:cSld>
+  <p:clrMapOvr>
+    <a:masterClrMapping/>
+  </p:clrMapOvr>
+</p:notes>
+</file>
+
+<file path=ppt/notesSlides/notesSlide19.xml><?xml version="1.0" encoding="utf-8"?>
+<p:notes xmlns:a="http://schemas.openxmlformats.org/drawingml/2006/main" xmlns:p="http://schemas.openxmlformats.org/presentationml/2006/main" xmlns:r="http://schemas.openxmlformats.org/officeDocument/2006/relationships">
+  <p:cSld>
+    <p:spTree>
+      <p:nvGrpSpPr>
+        <p:cNvPr id="1" name=""/>
+        <p:cNvGrpSpPr/>
+        <p:nvPr/>
+      </p:nvGrpSpPr>
+      <p:grpSpPr>
+        <a:xfrm>
+          <a:off x="0" y="0"/>
+          <a:ext cx="0" cy="0"/>
+          <a:chOff x="0" y="0"/>
+          <a:chExt cx="0" cy="0"/>
+        </a:xfrm>
+      </p:grpSpPr>
+      <p:sp>
+        <p:nvSpPr>
+          <p:cNvPr id="2" name="Slide Image Placeholder 1"/>
+          <p:cNvSpPr>
+            <a:spLocks noGrp="1"/>
+          </p:cNvSpPr>
+          <p:nvPr>
+            <p:ph type="sldImg" idx="2"/>
+          </p:nvPr>
+        </p:nvSpPr>
+        <p:spPr/>
+      </p:sp>
+      <p:sp>
+        <p:nvSpPr>
+          <p:cNvPr id="3" name="Notes Placeholder 2"/>
+          <p:cNvSpPr>
+            <a:spLocks noGrp="1"/>
+          </p:cNvSpPr>
+          <p:nvPr>
+            <p:ph type="body" idx="3" sz="quarter"/>
+          </p:nvPr>
+        </p:nvSpPr>
+        <p:spPr/>
+        <p:txBody>
+          <a:bodyPr/>
+          <a:lstStyle/>
+          <a:p>
+            <a:r>
+              <a:t>Claiming round: 'I'm a radiant woman, and I desire...' The circle answers: You're allowed.</a:t>
+            </a:r>
+          </a:p>
+        </p:txBody>
+      </p:sp>
+      <p:sp>
+        <p:nvSpPr>
+          <p:cNvPr id="4" name="Slide Number Placeholder 3"/>
+          <p:cNvSpPr>
+            <a:spLocks noGrp="1"/>
+          </p:cNvSpPr>
+          <p:nvPr>
+            <p:ph type="sldNum" idx="5" sz="quarter"/>
+          </p:nvPr>
+        </p:nvSpPr>
+        <p:spPr/>
+      </p:sp>
+    </p:spTree>
+  </p:cSld>
+  <p:clrMapOvr>
+    <a:masterClrMapping/>
+  </p:clrMapOvr>
+</p:notes>
+</file>
+
+<file path=ppt/notesSlides/notesSlide2.xml><?xml version="1.0" encoding="utf-8"?>
+<p:notes xmlns:a="http://schemas.openxmlformats.org/drawingml/2006/main" xmlns:p="http://schemas.openxmlformats.org/presentationml/2006/main" xmlns:r="http://schemas.openxmlformats.org/officeDocument/2006/relationships">
+  <p:cSld>
+    <p:spTree>
+      <p:nvGrpSpPr>
+        <p:cNvPr id="1" name=""/>
+        <p:cNvGrpSpPr/>
+        <p:nvPr/>
+      </p:nvGrpSpPr>
+      <p:grpSpPr>
+        <a:xfrm>
+          <a:off x="0" y="0"/>
+          <a:ext cx="0" cy="0"/>
+          <a:chOff x="0" y="0"/>
+          <a:chExt cx="0" cy="0"/>
+        </a:xfrm>
+      </p:grpSpPr>
+      <p:sp>
+        <p:nvSpPr>
+          <p:cNvPr id="2" name="Slide Image Placeholder 1"/>
+          <p:cNvSpPr>
+            <a:spLocks noGrp="1"/>
+          </p:cNvSpPr>
+          <p:nvPr>
+            <p:ph type="sldImg" idx="2"/>
+          </p:nvPr>
+        </p:nvSpPr>
+        <p:spPr/>
+      </p:sp>
+      <p:sp>
+        <p:nvSpPr>
+          <p:cNvPr id="3" name="Notes Placeholder 2"/>
+          <p:cNvSpPr>
+            <a:spLocks noGrp="1"/>
+          </p:cNvSpPr>
+          <p:nvPr>
+            <p:ph type="body" idx="3" sz="quarter"/>
+          </p:nvPr>
+        </p:nvSpPr>
+        <p:spPr/>
+        <p:txBody>
+          <a:bodyPr/>
+          <a:lstStyle/>
+          <a:p>
+            <a:r>
+              <a:t>Frame the night: your needs, your wants, your deepest desires. We start by coming home to yourself.</a:t>
+            </a:r>
+          </a:p>
+        </p:txBody>
+      </p:sp>
+      <p:sp>
+        <p:nvSpPr>
+          <p:cNvPr id="4" name="Slide Number Placeholder 3"/>
+          <p:cNvSpPr>
+            <a:spLocks noGrp="1"/>
+          </p:cNvSpPr>
+          <p:nvPr>
+            <p:ph type="sldNum" idx="5" sz="quarter"/>
+          </p:nvPr>
+        </p:nvSpPr>
+        <p:spPr/>
+      </p:sp>
+    </p:spTree>
+  </p:cSld>
+  <p:clrMapOvr>
+    <a:masterClrMapping/>
+  </p:clrMapOvr>
+</p:notes>
+</file>
+
+<file path=ppt/notesSlides/notesSlide20.xml><?xml version="1.0" encoding="utf-8"?>
+<p:notes xmlns:a="http://schemas.openxmlformats.org/drawingml/2006/main" xmlns:p="http://schemas.openxmlformats.org/presentationml/2006/main" xmlns:r="http://schemas.openxmlformats.org/officeDocument/2006/relationships">
+  <p:cSld>
+    <p:spTree>
+      <p:nvGrpSpPr>
+        <p:cNvPr id="1" name=""/>
+        <p:cNvGrpSpPr/>
+        <p:nvPr/>
+      </p:nvGrpSpPr>
+      <p:grpSpPr>
+        <a:xfrm>
+          <a:off x="0" y="0"/>
+          <a:ext cx="0" cy="0"/>
+          <a:chOff x="0" y="0"/>
+          <a:chExt cx="0" cy="0"/>
+        </a:xfrm>
+      </p:grpSpPr>
+      <p:sp>
+        <p:nvSpPr>
+          <p:cNvPr id="2" name="Slide Image Placeholder 1"/>
+          <p:cNvSpPr>
+            <a:spLocks noGrp="1"/>
+          </p:cNvSpPr>
+          <p:nvPr>
+            <p:ph type="sldImg" idx="2"/>
+          </p:nvPr>
+        </p:nvSpPr>
+        <p:spPr/>
+      </p:sp>
+      <p:sp>
+        <p:nvSpPr>
+          <p:cNvPr id="3" name="Notes Placeholder 2"/>
+          <p:cNvSpPr>
+            <a:spLocks noGrp="1"/>
+          </p:cNvSpPr>
+          <p:nvPr>
+            <p:ph type="body" idx="3" sz="quarter"/>
+          </p:nvPr>
+        </p:nvSpPr>
+        <p:spPr/>
+        <p:txBody>
+          <a:bodyPr/>
+          <a:lstStyle/>
+          <a:p>
+            <a:r>
+              <a:t>The power statement: I see myself. I am present to my own feelings, needs and desires. It is my destiny to be visible, and I take my rightful place.</a:t>
+            </a:r>
+          </a:p>
+        </p:txBody>
+      </p:sp>
+      <p:sp>
+        <p:nvSpPr>
+          <p:cNvPr id="4" name="Slide Number Placeholder 3"/>
+          <p:cNvSpPr>
+            <a:spLocks noGrp="1"/>
+          </p:cNvSpPr>
+          <p:nvPr>
+            <p:ph type="sldNum" idx="5" sz="quarter"/>
+          </p:nvPr>
+        </p:nvSpPr>
+        <p:spPr/>
+      </p:sp>
+    </p:spTree>
+  </p:cSld>
+  <p:clrMapOvr>
+    <a:masterClrMapping/>
+  </p:clrMapOvr>
+</p:notes>
+</file>
+
+<file path=ppt/notesSlides/notesSlide21.xml><?xml version="1.0" encoding="utf-8"?>
+<p:notes xmlns:a="http://schemas.openxmlformats.org/drawingml/2006/main" xmlns:p="http://schemas.openxmlformats.org/presentationml/2006/main" xmlns:r="http://schemas.openxmlformats.org/officeDocument/2006/relationships">
+  <p:cSld>
+    <p:spTree>
+      <p:nvGrpSpPr>
+        <p:cNvPr id="1" name=""/>
+        <p:cNvGrpSpPr/>
+        <p:nvPr/>
+      </p:nvGrpSpPr>
+      <p:grpSpPr>
+        <a:xfrm>
+          <a:off x="0" y="0"/>
+          <a:ext cx="0" cy="0"/>
+          <a:chOff x="0" y="0"/>
+          <a:chExt cx="0" cy="0"/>
+        </a:xfrm>
+      </p:grpSpPr>
+      <p:sp>
+        <p:nvSpPr>
+          <p:cNvPr id="2" name="Slide Image Placeholder 1"/>
+          <p:cNvSpPr>
+            <a:spLocks noGrp="1"/>
+          </p:cNvSpPr>
+          <p:nvPr>
+            <p:ph type="sldImg" idx="2"/>
+          </p:nvPr>
+        </p:nvSpPr>
+        <p:spPr/>
+      </p:sp>
+      <p:sp>
+        <p:nvSpPr>
+          <p:cNvPr id="3" name="Notes Placeholder 2"/>
+          <p:cNvSpPr>
+            <a:spLocks noGrp="1"/>
+          </p:cNvSpPr>
+          <p:nvPr>
+            <p:ph type="body" idx="3" sz="quarter"/>
+          </p:nvPr>
+        </p:nvSpPr>
+        <p:spPr/>
+        <p:txBody>
+          <a:bodyPr/>
+          <a:lstStyle/>
+          <a:p>
+            <a:r>
+              <a:t>Affirmation, hand on heart, together: I'm powerful. I can create life. I can create the life I desire. The power is in my hands.</a:t>
+            </a:r>
+          </a:p>
+        </p:txBody>
+      </p:sp>
+      <p:sp>
+        <p:nvSpPr>
+          <p:cNvPr id="4" name="Slide Number Placeholder 3"/>
+          <p:cNvSpPr>
+            <a:spLocks noGrp="1"/>
+          </p:cNvSpPr>
+          <p:nvPr>
+            <p:ph type="sldNum" idx="5" sz="quarter"/>
+          </p:nvPr>
+        </p:nvSpPr>
+        <p:spPr/>
+      </p:sp>
+    </p:spTree>
+  </p:cSld>
+  <p:clrMapOvr>
+    <a:masterClrMapping/>
+  </p:clrMapOvr>
+</p:notes>
+</file>
+
+<file path=ppt/notesSlides/notesSlide22.xml><?xml version="1.0" encoding="utf-8"?>
+<p:notes xmlns:a="http://schemas.openxmlformats.org/drawingml/2006/main" xmlns:p="http://schemas.openxmlformats.org/presentationml/2006/main" xmlns:r="http://schemas.openxmlformats.org/officeDocument/2006/relationships">
+  <p:cSld>
+    <p:spTree>
+      <p:nvGrpSpPr>
+        <p:cNvPr id="1" name=""/>
+        <p:cNvGrpSpPr/>
+        <p:nvPr/>
+      </p:nvGrpSpPr>
+      <p:grpSpPr>
+        <a:xfrm>
+          <a:off x="0" y="0"/>
+          <a:ext cx="0" cy="0"/>
+          <a:chOff x="0" y="0"/>
+          <a:chExt cx="0" cy="0"/>
+        </a:xfrm>
+      </p:grpSpPr>
+      <p:sp>
+        <p:nvSpPr>
+          <p:cNvPr id="2" name="Slide Image Placeholder 1"/>
+          <p:cNvSpPr>
+            <a:spLocks noGrp="1"/>
+          </p:cNvSpPr>
+          <p:nvPr>
+            <p:ph type="sldImg" idx="2"/>
+          </p:nvPr>
+        </p:nvSpPr>
+        <p:spPr/>
+      </p:sp>
+      <p:sp>
+        <p:nvSpPr>
+          <p:cNvPr id="3" name="Notes Placeholder 2"/>
+          <p:cNvSpPr>
+            <a:spLocks noGrp="1"/>
+          </p:cNvSpPr>
+          <p:nvPr>
+            <p:ph type="body" idx="3" sz="quarter"/>
+          </p:nvPr>
+        </p:nvSpPr>
+        <p:spPr/>
+        <p:txBody>
+          <a:bodyPr/>
+          <a:lstStyle/>
+          <a:p>
+            <a:r>
+              <a:t>Take-home: say one clean want a day, out loud; each night, whisper your deepest desire to yourself; you're teaching your body that your desire is safe. Closing round.</a:t>
+            </a:r>
+          </a:p>
+        </p:txBody>
+      </p:sp>
+      <p:sp>
+        <p:nvSpPr>
+          <p:cNvPr id="4" name="Slide Number Placeholder 3"/>
+          <p:cNvSpPr>
+            <a:spLocks noGrp="1"/>
+          </p:cNvSpPr>
+          <p:nvPr>
+            <p:ph type="sldNum" idx="5" sz="quarter"/>
+          </p:nvPr>
+        </p:nvSpPr>
+        <p:spPr/>
+      </p:sp>
+    </p:spTree>
+  </p:cSld>
+  <p:clrMapOvr>
+    <a:masterClrMapping/>
+  </p:clrMapOvr>
+</p:notes>
+</file>
+
+<file path=ppt/notesSlides/notesSlide3.xml><?xml version="1.0" encoding="utf-8"?>
+<p:notes xmlns:a="http://schemas.openxmlformats.org/drawingml/2006/main" xmlns:p="http://schemas.openxmlformats.org/presentationml/2006/main" xmlns:r="http://schemas.openxmlformats.org/officeDocument/2006/relationships">
+  <p:cSld>
+    <p:spTree>
+      <p:nvGrpSpPr>
+        <p:cNvPr id="1" name=""/>
+        <p:cNvGrpSpPr/>
+        <p:nvPr/>
+      </p:nvGrpSpPr>
+      <p:grpSpPr>
+        <a:xfrm>
+          <a:off x="0" y="0"/>
+          <a:ext cx="0" cy="0"/>
+          <a:chOff x="0" y="0"/>
+          <a:chExt cx="0" cy="0"/>
+        </a:xfrm>
+      </p:grpSpPr>
+      <p:sp>
+        <p:nvSpPr>
+          <p:cNvPr id="2" name="Slide Image Placeholder 1"/>
+          <p:cNvSpPr>
+            <a:spLocks noGrp="1"/>
+          </p:cNvSpPr>
+          <p:nvPr>
+            <p:ph type="sldImg" idx="2"/>
+          </p:nvPr>
+        </p:nvSpPr>
+        <p:spPr/>
+      </p:sp>
+      <p:sp>
+        <p:nvSpPr>
+          <p:cNvPr id="3" name="Notes Placeholder 2"/>
+          <p:cNvSpPr>
+            <a:spLocks noGrp="1"/>
+          </p:cNvSpPr>
+          <p:nvPr>
+            <p:ph type="body" idx="3" sz="quarter"/>
+          </p:nvPr>
+        </p:nvSpPr>
+        <p:spPr/>
+        <p:txBody>
+          <a:bodyPr/>
+          <a:lstStyle/>
+          <a:p>
+            <a:r>
+              <a:t>Read the agreements aloud: what's shared here stays here; we witness, we don't fix or rescue; there's no right or wrong way; there's no such thing as too much in this room.</a:t>
+            </a:r>
+          </a:p>
+        </p:txBody>
+      </p:sp>
+      <p:sp>
+        <p:nvSpPr>
+          <p:cNvPr id="4" name="Slide Number Placeholder 3"/>
+          <p:cNvSpPr>
+            <a:spLocks noGrp="1"/>
+          </p:cNvSpPr>
+          <p:nvPr>
+            <p:ph type="sldNum" idx="5" sz="quarter"/>
+          </p:nvPr>
+        </p:nvSpPr>
+        <p:spPr/>
+      </p:sp>
+    </p:spTree>
+  </p:cSld>
+  <p:clrMapOvr>
+    <a:masterClrMapping/>
+  </p:clrMapOvr>
+</p:notes>
+</file>
+
+<file path=ppt/notesSlides/notesSlide4.xml><?xml version="1.0" encoding="utf-8"?>
+<p:notes xmlns:a="http://schemas.openxmlformats.org/drawingml/2006/main" xmlns:p="http://schemas.openxmlformats.org/presentationml/2006/main" xmlns:r="http://schemas.openxmlformats.org/officeDocument/2006/relationships">
+  <p:cSld>
+    <p:spTree>
+      <p:nvGrpSpPr>
+        <p:cNvPr id="1" name=""/>
+        <p:cNvGrpSpPr/>
+        <p:nvPr/>
+      </p:nvGrpSpPr>
+      <p:grpSpPr>
+        <a:xfrm>
+          <a:off x="0" y="0"/>
+          <a:ext cx="0" cy="0"/>
+          <a:chOff x="0" y="0"/>
+          <a:chExt cx="0" cy="0"/>
+        </a:xfrm>
+      </p:grpSpPr>
+      <p:sp>
+        <p:nvSpPr>
+          <p:cNvPr id="2" name="Slide Image Placeholder 1"/>
+          <p:cNvSpPr>
+            <a:spLocks noGrp="1"/>
+          </p:cNvSpPr>
+          <p:nvPr>
+            <p:ph type="sldImg" idx="2"/>
+          </p:nvPr>
+        </p:nvSpPr>
+        <p:spPr/>
+      </p:sp>
+      <p:sp>
+        <p:nvSpPr>
+          <p:cNvPr id="3" name="Notes Placeholder 2"/>
+          <p:cNvSpPr>
+            <a:spLocks noGrp="1"/>
+          </p:cNvSpPr>
+          <p:nvPr>
+            <p:ph type="body" idx="3" sz="quarter"/>
+          </p:nvPr>
+        </p:nvSpPr>
+        <p:spPr/>
+        <p:txBody>
+          <a:bodyPr/>
+          <a:lstStyle/>
+          <a:p>
+            <a:r>
+              <a:t>Guide: eyes closed, soften the jaw, drop the shoulders, unclench the belly, release the pelvic floor. 'She doesn't live in the tension, she lives in the softening.' Three slow breaths, let the day fall away.</a:t>
+            </a:r>
+          </a:p>
+        </p:txBody>
+      </p:sp>
+      <p:sp>
+        <p:nvSpPr>
+          <p:cNvPr id="4" name="Slide Number Placeholder 3"/>
+          <p:cNvSpPr>
+            <a:spLocks noGrp="1"/>
+          </p:cNvSpPr>
+          <p:nvPr>
+            <p:ph type="sldNum" idx="5" sz="quarter"/>
+          </p:nvPr>
+        </p:nvSpPr>
+        <p:spPr/>
+      </p:sp>
+    </p:spTree>
+  </p:cSld>
+  <p:clrMapOvr>
+    <a:masterClrMapping/>
+  </p:clrMapOvr>
+</p:notes>
+</file>
+
+<file path=ppt/notesSlides/notesSlide5.xml><?xml version="1.0" encoding="utf-8"?>
+<p:notes xmlns:a="http://schemas.openxmlformats.org/drawingml/2006/main" xmlns:p="http://schemas.openxmlformats.org/presentationml/2006/main" xmlns:r="http://schemas.openxmlformats.org/officeDocument/2006/relationships">
+  <p:cSld>
+    <p:spTree>
+      <p:nvGrpSpPr>
+        <p:cNvPr id="1" name=""/>
+        <p:cNvGrpSpPr/>
+        <p:nvPr/>
+      </p:nvGrpSpPr>
+      <p:grpSpPr>
+        <a:xfrm>
+          <a:off x="0" y="0"/>
+          <a:ext cx="0" cy="0"/>
+          <a:chOff x="0" y="0"/>
+          <a:chExt cx="0" cy="0"/>
+        </a:xfrm>
+      </p:grpSpPr>
+      <p:sp>
+        <p:nvSpPr>
+          <p:cNvPr id="2" name="Slide Image Placeholder 1"/>
+          <p:cNvSpPr>
+            <a:spLocks noGrp="1"/>
+          </p:cNvSpPr>
+          <p:nvPr>
+            <p:ph type="sldImg" idx="2"/>
+          </p:nvPr>
+        </p:nvSpPr>
+        <p:spPr/>
+      </p:sp>
+      <p:sp>
+        <p:nvSpPr>
+          <p:cNvPr id="3" name="Notes Placeholder 2"/>
+          <p:cNvSpPr>
+            <a:spLocks noGrp="1"/>
+          </p:cNvSpPr>
+          <p:nvPr>
+            <p:ph type="body" idx="3" sz="quarter"/>
+          </p:nvPr>
+        </p:nvSpPr>
+        <p:spPr/>
+        <p:txBody>
+          <a:bodyPr/>
+          <a:lstStyle/>
+          <a:p>
+            <a:r>
+              <a:t>Teach the distinction: Needs, what you can't be well without. Wants, the specific things that meet a need. Desires, the deep, alive pull, your compass. You can't ask for what you can't name, so we name them first.</a:t>
+            </a:r>
+          </a:p>
+        </p:txBody>
+      </p:sp>
+      <p:sp>
+        <p:nvSpPr>
+          <p:cNvPr id="4" name="Slide Number Placeholder 3"/>
+          <p:cNvSpPr>
+            <a:spLocks noGrp="1"/>
+          </p:cNvSpPr>
+          <p:nvPr>
+            <p:ph type="sldNum" idx="5" sz="quarter"/>
+          </p:nvPr>
+        </p:nvSpPr>
+        <p:spPr/>
+      </p:sp>
+    </p:spTree>
+  </p:cSld>
+  <p:clrMapOvr>
+    <a:masterClrMapping/>
+  </p:clrMapOvr>
+</p:notes>
+</file>
+
+<file path=ppt/notesSlides/notesSlide6.xml><?xml version="1.0" encoding="utf-8"?>
+<p:notes xmlns:a="http://schemas.openxmlformats.org/drawingml/2006/main" xmlns:p="http://schemas.openxmlformats.org/presentationml/2006/main" xmlns:r="http://schemas.openxmlformats.org/officeDocument/2006/relationships">
+  <p:cSld>
+    <p:spTree>
+      <p:nvGrpSpPr>
+        <p:cNvPr id="1" name=""/>
+        <p:cNvGrpSpPr/>
+        <p:nvPr/>
+      </p:nvGrpSpPr>
+      <p:grpSpPr>
+        <a:xfrm>
+          <a:off x="0" y="0"/>
+          <a:ext cx="0" cy="0"/>
+          <a:chOff x="0" y="0"/>
+          <a:chExt cx="0" cy="0"/>
+        </a:xfrm>
+      </p:grpSpPr>
+      <p:sp>
+        <p:nvSpPr>
+          <p:cNvPr id="2" name="Slide Image Placeholder 1"/>
+          <p:cNvSpPr>
+            <a:spLocks noGrp="1"/>
+          </p:cNvSpPr>
+          <p:nvPr>
+            <p:ph type="sldImg" idx="2"/>
+          </p:nvPr>
+        </p:nvSpPr>
+        <p:spPr/>
+      </p:sp>
+      <p:sp>
+        <p:nvSpPr>
+          <p:cNvPr id="3" name="Notes Placeholder 2"/>
+          <p:cNvSpPr>
+            <a:spLocks noGrp="1"/>
+          </p:cNvSpPr>
+          <p:nvPr>
+            <p:ph type="body" idx="3" sz="quarter"/>
+          </p:nvPr>
+        </p:nvSpPr>
+        <p:spPr/>
+        <p:txBody>
+          <a:bodyPr/>
+          <a:lstStyle/>
+          <a:p>
+            <a:r>
+              <a:t>You've been gathering everyone else's needs so long you lost the thread of your own. Tonight we pick it back up.</a:t>
+            </a:r>
+          </a:p>
+        </p:txBody>
+      </p:sp>
+      <p:sp>
+        <p:nvSpPr>
+          <p:cNvPr id="4" name="Slide Number Placeholder 3"/>
+          <p:cNvSpPr>
+            <a:spLocks noGrp="1"/>
+          </p:cNvSpPr>
+          <p:nvPr>
+            <p:ph type="sldNum" idx="5" sz="quarter"/>
+          </p:nvPr>
+        </p:nvSpPr>
+        <p:spPr/>
+      </p:sp>
+    </p:spTree>
+  </p:cSld>
+  <p:clrMapOvr>
+    <a:masterClrMapping/>
+  </p:clrMapOvr>
+</p:notes>
+</file>
+
+<file path=ppt/notesSlides/notesSlide7.xml><?xml version="1.0" encoding="utf-8"?>
+<p:notes xmlns:a="http://schemas.openxmlformats.org/drawingml/2006/main" xmlns:p="http://schemas.openxmlformats.org/presentationml/2006/main" xmlns:r="http://schemas.openxmlformats.org/officeDocument/2006/relationships">
+  <p:cSld>
+    <p:spTree>
+      <p:nvGrpSpPr>
+        <p:cNvPr id="1" name=""/>
+        <p:cNvGrpSpPr/>
+        <p:nvPr/>
+      </p:nvGrpSpPr>
+      <p:grpSpPr>
+        <a:xfrm>
+          <a:off x="0" y="0"/>
+          <a:ext cx="0" cy="0"/>
+          <a:chOff x="0" y="0"/>
+          <a:chExt cx="0" cy="0"/>
+        </a:xfrm>
+      </p:grpSpPr>
+      <p:sp>
+        <p:nvSpPr>
+          <p:cNvPr id="2" name="Slide Image Placeholder 1"/>
+          <p:cNvSpPr>
+            <a:spLocks noGrp="1"/>
+          </p:cNvSpPr>
+          <p:nvPr>
+            <p:ph type="sldImg" idx="2"/>
+          </p:nvPr>
+        </p:nvSpPr>
+        <p:spPr/>
+      </p:sp>
+      <p:sp>
+        <p:nvSpPr>
+          <p:cNvPr id="3" name="Notes Placeholder 2"/>
+          <p:cNvSpPr>
+            <a:spLocks noGrp="1"/>
+          </p:cNvSpPr>
+          <p:nvPr>
+            <p:ph type="body" idx="3" sz="quarter"/>
+          </p:nvPr>
+        </p:nvSpPr>
+        <p:spPr/>
+        <p:txBody>
+          <a:bodyPr/>
+          <a:lstStyle/>
+          <a:p>
+            <a:r>
+              <a:t>Claire Zammit's work. You are not overlooked by accident. Set it up gently, this is the piece most women have never heard.</a:t>
+            </a:r>
+          </a:p>
+        </p:txBody>
+      </p:sp>
+      <p:sp>
+        <p:nvSpPr>
+          <p:cNvPr id="4" name="Slide Number Placeholder 3"/>
+          <p:cNvSpPr>
+            <a:spLocks noGrp="1"/>
+          </p:cNvSpPr>
+          <p:nvPr>
+            <p:ph type="sldNum" idx="5" sz="quarter"/>
+          </p:nvPr>
+        </p:nvSpPr>
+        <p:spPr/>
+      </p:sp>
+    </p:spTree>
+  </p:cSld>
+  <p:clrMapOvr>
+    <a:masterClrMapping/>
+  </p:clrMapOvr>
+</p:notes>
+</file>
+
+<file path=ppt/notesSlides/notesSlide8.xml><?xml version="1.0" encoding="utf-8"?>
+<p:notes xmlns:a="http://schemas.openxmlformats.org/drawingml/2006/main" xmlns:p="http://schemas.openxmlformats.org/presentationml/2006/main" xmlns:r="http://schemas.openxmlformats.org/officeDocument/2006/relationships">
+  <p:cSld>
+    <p:spTree>
+      <p:nvGrpSpPr>
+        <p:cNvPr id="1" name=""/>
+        <p:cNvGrpSpPr/>
+        <p:nvPr/>
+      </p:nvGrpSpPr>
+      <p:grpSpPr>
+        <a:xfrm>
+          <a:off x="0" y="0"/>
+          <a:ext cx="0" cy="0"/>
+          <a:chOff x="0" y="0"/>
+          <a:chExt cx="0" cy="0"/>
+        </a:xfrm>
+      </p:grpSpPr>
+      <p:sp>
+        <p:nvSpPr>
+          <p:cNvPr id="2" name="Slide Image Placeholder 1"/>
+          <p:cNvSpPr>
+            <a:spLocks noGrp="1"/>
+          </p:cNvSpPr>
+          <p:nvPr>
+            <p:ph type="sldImg" idx="2"/>
+          </p:nvPr>
+        </p:nvSpPr>
+        <p:spPr/>
+      </p:sp>
+      <p:sp>
+        <p:nvSpPr>
+          <p:cNvPr id="3" name="Notes Placeholder 2"/>
+          <p:cNvSpPr>
+            <a:spLocks noGrp="1"/>
+          </p:cNvSpPr>
+          <p:nvPr>
+            <p:ph type="body" idx="3" sz="quarter"/>
+          </p:nvPr>
+        </p:nvSpPr>
+        <p:spPr/>
+        <p:txBody>
+          <a:bodyPr/>
+          <a:lstStyle/>
+          <a:p>
+            <a:r>
+              <a:t>The I'm Invisible pattern: my attention is on everyone but me; I assume you can see what I never said; I serve until I'm empty; I wait, quietly, to be discovered. The key mechanism: assuming it's others' job to see what we never make visible.</a:t>
+            </a:r>
+          </a:p>
+        </p:txBody>
+      </p:sp>
+      <p:sp>
+        <p:nvSpPr>
+          <p:cNvPr id="4" name="Slide Number Placeholder 3"/>
+          <p:cNvSpPr>
+            <a:spLocks noGrp="1"/>
+          </p:cNvSpPr>
+          <p:nvPr>
+            <p:ph type="sldNum" idx="5" sz="quarter"/>
+          </p:nvPr>
+        </p:nvSpPr>
+        <p:spPr/>
+      </p:sp>
+    </p:spTree>
+  </p:cSld>
+  <p:clrMapOvr>
+    <a:masterClrMapping/>
+  </p:clrMapOvr>
+</p:notes>
+</file>
+
+<file path=ppt/notesSlides/notesSlide9.xml><?xml version="1.0" encoding="utf-8"?>
+<p:notes xmlns:a="http://schemas.openxmlformats.org/drawingml/2006/main" xmlns:p="http://schemas.openxmlformats.org/presentationml/2006/main" xmlns:r="http://schemas.openxmlformats.org/officeDocument/2006/relationships">
+  <p:cSld>
+    <p:spTree>
+      <p:nvGrpSpPr>
+        <p:cNvPr id="1" name=""/>
+        <p:cNvGrpSpPr/>
+        <p:nvPr/>
+      </p:nvGrpSpPr>
+      <p:grpSpPr>
+        <a:xfrm>
+          <a:off x="0" y="0"/>
+          <a:ext cx="0" cy="0"/>
+          <a:chOff x="0" y="0"/>
+          <a:chExt cx="0" cy="0"/>
+        </a:xfrm>
+      </p:grpSpPr>
+      <p:sp>
+        <p:nvSpPr>
+          <p:cNvPr id="2" name="Slide Image Placeholder 1"/>
+          <p:cNvSpPr>
+            <a:spLocks noGrp="1"/>
+          </p:cNvSpPr>
+          <p:nvPr>
+            <p:ph type="sldImg" idx="2"/>
+          </p:nvPr>
+        </p:nvSpPr>
+        <p:spPr/>
+      </p:sp>
+      <p:sp>
+        <p:nvSpPr>
+          <p:cNvPr id="3" name="Notes Placeholder 2"/>
+          <p:cNvSpPr>
+            <a:spLocks noGrp="1"/>
+          </p:cNvSpPr>
+          <p:nvPr>
+            <p:ph type="body" idx="3" sz="quarter"/>
+          </p:nvPr>
+        </p:nvSpPr>
+        <p:spPr/>
+        <p:txBody>
+          <a:bodyPr/>
+          <a:lstStyle/>
+          <a:p>
+            <a:r>
+              <a:t>The self-fulfilling loop: believe you're invisible, disappear yourself while focused on others, they don't see you, you feel invisible, resentment, you ask with accusation, they defend, you feel invisible again. The belief builds its own proof.</a:t>
+            </a:r>
+          </a:p>
+        </p:txBody>
+      </p:sp>
+      <p:sp>
+        <p:nvSpPr>
+          <p:cNvPr id="4" name="Slide Number Placeholder 3"/>
+          <p:cNvSpPr>
+            <a:spLocks noGrp="1"/>
+          </p:cNvSpPr>
+          <p:nvPr>
+            <p:ph type="sldNum" idx="5" sz="quarter"/>
+          </p:nvPr>
+        </p:nvSpPr>
+        <p:spPr/>
+      </p:sp>
+    </p:spTree>
+  </p:cSld>
+  <p:clrMapOvr>
+    <a:masterClrMapping/>
+  </p:clrMapOvr>
+</p:notes>
 </file>
 
 <file path=ppt/slideLayouts/slideLayout1.xml><?xml version="1.0" encoding="utf-8"?>
@@ -8025,4 +9915,324 @@
   </a:objectDefaults>
   <a:extraClrSchemeLst/>
 </a:theme>
+</file>
+
+<file path=ppt/theme/theme2.xml><?xml version="1.0" encoding="utf-8"?>
+<a:theme xmlns:a="http://schemas.openxmlformats.org/drawingml/2006/main" name="Office Theme">
+  <a:themeElements>
+    <a:clrScheme name="Office">
+      <a:dk1>
+        <a:sysClr val="windowText" lastClr="000000"/>
+      </a:dk1>
+      <a:lt1>
+        <a:sysClr val="window" lastClr="FFFFFF"/>
+      </a:lt1>
+      <a:dk2>
+        <a:srgbClr val="1F497D"/>
+      </a:dk2>
+      <a:lt2>
+        <a:srgbClr val="EEECE1"/>
+      </a:lt2>
+      <a:accent1>
+        <a:srgbClr val="4F81BD"/>
+      </a:accent1>
+      <a:accent2>
+        <a:srgbClr val="C0504D"/>
+      </a:accent2>
+      <a:accent3>
+        <a:srgbClr val="9BBB59"/>
+      </a:accent3>
+      <a:accent4>
+        <a:srgbClr val="8064A2"/>
+      </a:accent4>
+      <a:accent5>
+        <a:srgbClr val="4BACC6"/>
+      </a:accent5>
+      <a:accent6>
+        <a:srgbClr val="F79646"/>
+      </a:accent6>
+      <a:hlink>
+        <a:srgbClr val="0000FF"/>
+      </a:hlink>
+      <a:folHlink>
+        <a:srgbClr val="800080"/>
+      </a:folHlink>
+    </a:clrScheme>
+    <a:fontScheme name="Office">
+      <a:majorFont>
+        <a:latin typeface="Calibri"/>
+        <a:ea typeface=""/>
+        <a:cs typeface=""/>
+        <a:font script="Jpan" typeface="ＭＳ Ｐゴシック"/>
+        <a:font script="Hang" typeface="맑은 고딕"/>
+        <a:font script="Hans" typeface="宋体"/>
+        <a:font script="Hant" typeface="新細明體"/>
+        <a:font script="Arab" typeface="Times New Roman"/>
+        <a:font script="Hebr" typeface="Times New Roman"/>
+        <a:font script="Thai" typeface="Angsana New"/>
+        <a:font script="Ethi" typeface="Nyala"/>
+        <a:font script="Beng" typeface="Vrinda"/>
+        <a:font script="Gujr" typeface="Shruti"/>
+        <a:font script="Khmr" typeface="MoolBoran"/>
+        <a:font script="Knda" typeface="Tunga"/>
+        <a:font script="Guru" typeface="Raavi"/>
+        <a:font script="Cans" typeface="Euphemia"/>
+        <a:font script="Cher" typeface="Plantagenet Cherokee"/>
+        <a:font script="Yiii" typeface="Microsoft Yi Baiti"/>
+        <a:font script="Tibt" typeface="Microsoft Himalaya"/>
+        <a:font script="Thaa" typeface="MV Boli"/>
+        <a:font script="Deva" typeface="Mangal"/>
+        <a:font script="Telu" typeface="Gautami"/>
+        <a:font script="Taml" typeface="Latha"/>
+        <a:font script="Syrc" typeface="Estrangelo Edessa"/>
+        <a:font script="Orya" typeface="Kalinga"/>
+        <a:font script="Mlym" typeface="Kartika"/>
+        <a:font script="Laoo" typeface="DokChampa"/>
+        <a:font script="Sinh" typeface="Iskoola Pota"/>
+        <a:font script="Mong" typeface="Mongolian Baiti"/>
+        <a:font script="Viet" typeface="Times New Roman"/>
+        <a:font script="Uigh" typeface="Microsoft Uighur"/>
+        <a:font script="Geor" typeface="Sylfaen"/>
+      </a:majorFont>
+      <a:minorFont>
+        <a:latin typeface="Calibri"/>
+        <a:ea typeface=""/>
+        <a:cs typeface=""/>
+        <a:font script="Jpan" typeface="ＭＳ Ｐゴシック"/>
+        <a:font script="Hang" typeface="맑은 고딕"/>
+        <a:font script="Hans" typeface="宋体"/>
+        <a:font script="Hant" typeface="新細明體"/>
+        <a:font script="Arab" typeface="Arial"/>
+        <a:font script="Hebr" typeface="Arial"/>
+        <a:font script="Thai" typeface="Cordia New"/>
+        <a:font script="Ethi" typeface="Nyala"/>
+        <a:font script="Beng" typeface="Vrinda"/>
+        <a:font script="Gujr" typeface="Shruti"/>
+        <a:font script="Khmr" typeface="DaunPenh"/>
+        <a:font script="Knda" typeface="Tunga"/>
+        <a:font script="Guru" typeface="Raavi"/>
+        <a:font script="Cans" typeface="Euphemia"/>
+        <a:font script="Cher" typeface="Plantagenet Cherokee"/>
+        <a:font script="Yiii" typeface="Microsoft Yi Baiti"/>
+        <a:font script="Tibt" typeface="Microsoft Himalaya"/>
+        <a:font script="Thaa" typeface="MV Boli"/>
+        <a:font script="Deva" typeface="Mangal"/>
+        <a:font script="Telu" typeface="Gautami"/>
+        <a:font script="Taml" typeface="Latha"/>
+        <a:font script="Syrc" typeface="Estrangelo Edessa"/>
+        <a:font script="Orya" typeface="Kalinga"/>
+        <a:font script="Mlym" typeface="Kartika"/>
+        <a:font script="Laoo" typeface="DokChampa"/>
+        <a:font script="Sinh" typeface="Iskoola Pota"/>
+        <a:font script="Mong" typeface="Mongolian Baiti"/>
+        <a:font script="Viet" typeface="Arial"/>
+        <a:font script="Uigh" typeface="Microsoft Uighur"/>
+        <a:font script="Geor" typeface="Sylfaen"/>
+      </a:minorFont>
+    </a:fontScheme>
+    <a:fmtScheme name="Office">
+      <a:fillStyleLst>
+        <a:solidFill>
+          <a:schemeClr val="phClr"/>
+        </a:solidFill>
+        <a:gradFill rotWithShape="1">
+          <a:gsLst>
+            <a:gs pos="0">
+              <a:schemeClr val="phClr">
+                <a:tint val="50000"/>
+                <a:satMod val="300000"/>
+              </a:schemeClr>
+            </a:gs>
+            <a:gs pos="35000">
+              <a:schemeClr val="phClr">
+                <a:tint val="37000"/>
+                <a:satMod val="300000"/>
+              </a:schemeClr>
+            </a:gs>
+            <a:gs pos="100000">
+              <a:schemeClr val="phClr">
+                <a:tint val="15000"/>
+                <a:satMod val="350000"/>
+              </a:schemeClr>
+            </a:gs>
+          </a:gsLst>
+          <a:lin ang="16200000" scaled="1"/>
+        </a:gradFill>
+        <a:gradFill rotWithShape="1">
+          <a:gsLst>
+            <a:gs pos="0">
+              <a:schemeClr val="phClr">
+                <a:tint val="100000"/>
+                <a:shade val="100000"/>
+                <a:satMod val="130000"/>
+              </a:schemeClr>
+            </a:gs>
+            <a:gs pos="100000">
+              <a:schemeClr val="phClr">
+                <a:tint val="50000"/>
+                <a:shade val="100000"/>
+                <a:satMod val="350000"/>
+              </a:schemeClr>
+            </a:gs>
+          </a:gsLst>
+          <a:lin ang="16200000" scaled="0"/>
+        </a:gradFill>
+      </a:fillStyleLst>
+      <a:lnStyleLst>
+        <a:ln w="9525" cap="flat" cmpd="sng" algn="ctr">
+          <a:solidFill>
+            <a:schemeClr val="phClr">
+              <a:shade val="95000"/>
+              <a:satMod val="105000"/>
+            </a:schemeClr>
+          </a:solidFill>
+          <a:prstDash val="solid"/>
+        </a:ln>
+        <a:ln w="25400" cap="flat" cmpd="sng" algn="ctr">
+          <a:solidFill>
+            <a:schemeClr val="phClr"/>
+          </a:solidFill>
+          <a:prstDash val="solid"/>
+        </a:ln>
+        <a:ln w="38100" cap="flat" cmpd="sng" algn="ctr">
+          <a:solidFill>
+            <a:schemeClr val="phClr"/>
+          </a:solidFill>
+          <a:prstDash val="solid"/>
+        </a:ln>
+      </a:lnStyleLst>
+      <a:effectStyleLst>
+        <a:effectStyle>
+          <a:effectLst>
+            <a:outerShdw blurRad="40000" dist="20000" dir="5400000" rotWithShape="0">
+              <a:srgbClr val="000000">
+                <a:alpha val="38000"/>
+              </a:srgbClr>
+            </a:outerShdw>
+          </a:effectLst>
+        </a:effectStyle>
+        <a:effectStyle>
+          <a:effectLst>
+            <a:outerShdw blurRad="40000" dist="23000" dir="5400000" rotWithShape="0">
+              <a:srgbClr val="000000">
+                <a:alpha val="35000"/>
+              </a:srgbClr>
+            </a:outerShdw>
+          </a:effectLst>
+        </a:effectStyle>
+        <a:effectStyle>
+          <a:effectLst>
+            <a:outerShdw blurRad="40000" dist="23000" dir="5400000" rotWithShape="0">
+              <a:srgbClr val="000000">
+                <a:alpha val="35000"/>
+              </a:srgbClr>
+            </a:outerShdw>
+          </a:effectLst>
+          <a:scene3d>
+            <a:camera prst="orthographicFront">
+              <a:rot lat="0" lon="0" rev="0"/>
+            </a:camera>
+            <a:lightRig rig="threePt" dir="t">
+              <a:rot lat="0" lon="0" rev="1200000"/>
+            </a:lightRig>
+          </a:scene3d>
+          <a:sp3d>
+            <a:bevelT w="63500" h="25400"/>
+          </a:sp3d>
+        </a:effectStyle>
+      </a:effectStyleLst>
+      <a:bgFillStyleLst>
+        <a:solidFill>
+          <a:schemeClr val="phClr"/>
+        </a:solidFill>
+        <a:gradFill rotWithShape="1">
+          <a:gsLst>
+            <a:gs pos="0">
+              <a:schemeClr val="phClr">
+                <a:tint val="40000"/>
+                <a:satMod val="350000"/>
+              </a:schemeClr>
+            </a:gs>
+            <a:gs pos="40000">
+              <a:schemeClr val="phClr">
+                <a:tint val="45000"/>
+                <a:shade val="99000"/>
+                <a:satMod val="350000"/>
+              </a:schemeClr>
+            </a:gs>
+            <a:gs pos="100000">
+              <a:schemeClr val="phClr">
+                <a:shade val="20000"/>
+                <a:satMod val="255000"/>
+              </a:schemeClr>
+            </a:gs>
+          </a:gsLst>
+          <a:path path="circle">
+            <a:fillToRect l="50000" t="-80000" r="50000" b="180000"/>
+          </a:path>
+        </a:gradFill>
+        <a:gradFill rotWithShape="1">
+          <a:gsLst>
+            <a:gs pos="0">
+              <a:schemeClr val="phClr">
+                <a:tint val="80000"/>
+                <a:satMod val="300000"/>
+              </a:schemeClr>
+            </a:gs>
+            <a:gs pos="100000">
+              <a:schemeClr val="phClr">
+                <a:shade val="30000"/>
+                <a:satMod val="200000"/>
+              </a:schemeClr>
+            </a:gs>
+          </a:gsLst>
+          <a:path path="circle">
+            <a:fillToRect l="50000" t="50000" r="50000" b="50000"/>
+          </a:path>
+        </a:gradFill>
+      </a:bgFillStyleLst>
+    </a:fmtScheme>
+  </a:themeElements>
+  <a:objectDefaults>
+    <a:spDef>
+      <a:spPr/>
+      <a:bodyPr/>
+      <a:lstStyle/>
+      <a:style>
+        <a:lnRef idx="1">
+          <a:schemeClr val="accent1"/>
+        </a:lnRef>
+        <a:fillRef idx="3">
+          <a:schemeClr val="accent1"/>
+        </a:fillRef>
+        <a:effectRef idx="2">
+          <a:schemeClr val="accent1"/>
+        </a:effectRef>
+        <a:fontRef idx="minor">
+          <a:schemeClr val="lt1"/>
+        </a:fontRef>
+      </a:style>
+    </a:spDef>
+    <a:lnDef>
+      <a:spPr/>
+      <a:bodyPr/>
+      <a:lstStyle/>
+      <a:style>
+        <a:lnRef idx="2">
+          <a:schemeClr val="accent1"/>
+        </a:lnRef>
+        <a:fillRef idx="0">
+          <a:schemeClr val="accent1"/>
+        </a:fillRef>
+        <a:effectRef idx="1">
+          <a:schemeClr val="accent1"/>
+        </a:effectRef>
+        <a:fontRef idx="minor">
+          <a:schemeClr val="tx1"/>
+        </a:fontRef>
+      </a:style>
+    </a:lnDef>
+  </a:objectDefaults>
+  <a:extraClrSchemeLst/>
+</a:theme>
 </file>